--- a/docs/選定結果フィードバック_ライズコンサルティング様.pptx
+++ b/docs/選定結果フィードバック_ライズコンサルティング様.pptx
@@ -2566,7 +2566,7 @@
                 <a:ea typeface="Meiryo" pitchFamily="34" charset="-122"/>
                 <a:cs typeface="Meiryo" pitchFamily="34" charset="-120"/>
               </a:rPr>
-              <a:t>評価に差が生じた観点を、今後のご参考として率直にお伝えいたします。今後のフェーズやテーマによっては改めてご相談させていただく可能性もございますので、引き続きのご関係をお願い申し上げます。</a:t>
+              <a:t>評価に差が生じた観点と、それぞれの改善要素を今後のご参考として率直にお伝えいたします。今後のフェーズやテーマによっては改めてご相談させていただく可能性もございますので、引き続きのご関係をお願い申し上げます。</a:t>
             </a:r>
             <a:endParaRPr lang="en-US" sz="1100" dirty="0"/>
           </a:p>
@@ -2649,7 +2649,7 @@
                 <a:ea typeface="Meiryo" pitchFamily="34" charset="-122"/>
                 <a:cs typeface="Meiryo" pitchFamily="34" charset="-120"/>
               </a:rPr>
-              <a:t>評価に差が生じた主な観点（弊社採点表より）</a:t>
+              <a:t>評価に差が生じた観点と、次回に向けた改善要素</a:t>
             </a:r>
             <a:endParaRPr lang="en-US" sz="1450" dirty="0"/>
           </a:p>
@@ -2692,7 +2692,7 @@
         </p:nvSpPr>
         <p:spPr>
           <a:xfrm>
-            <a:off x="667512" y="2304288"/>
+            <a:off x="667512" y="2286000"/>
             <a:ext cx="384048" cy="384048"/>
           </a:xfrm>
           <a:prstGeom prst="ellipse">
@@ -2720,7 +2720,7 @@
         </p:blipFill>
         <p:spPr>
           <a:xfrm>
-            <a:off x="754380" y="2391156"/>
+            <a:off x="754380" y="2372868"/>
             <a:ext cx="210312" cy="210312"/>
           </a:xfrm>
           <a:prstGeom prst="rect">
@@ -2736,8 +2736,8 @@
         </p:nvSpPr>
         <p:spPr>
           <a:xfrm>
-            <a:off x="1161288" y="2286000"/>
-            <a:ext cx="6099048" cy="438912"/>
+            <a:off x="1161288" y="2267712"/>
+            <a:ext cx="6099048" cy="402336"/>
           </a:xfrm>
           <a:prstGeom prst="rect">
             <a:avLst/>
@@ -2775,8 +2775,8 @@
         </p:nvSpPr>
         <p:spPr>
           <a:xfrm>
-            <a:off x="704088" y="2816352"/>
-            <a:ext cx="6501384" cy="566928"/>
+            <a:off x="704088" y="2743200"/>
+            <a:ext cx="3858768" cy="658368"/>
           </a:xfrm>
           <a:prstGeom prst="rect">
             <a:avLst/>
@@ -2790,12 +2790,12 @@
           <a:p>
             <a:pPr indent="0" marL="0">
               <a:lnSpc>
-                <a:spcPct val="112000"/>
+                <a:spcPct val="110000"/>
               </a:lnSpc>
               <a:buNone/>
             </a:pPr>
             <a:r>
-              <a:rPr lang="en-US" sz="980" dirty="0">
+              <a:rPr lang="en-US" sz="940" dirty="0">
                 <a:solidFill>
                   <a:srgbClr val="26303B"/>
                 </a:solidFill>
@@ -2805,13 +2805,117 @@
               </a:rPr>
               <a:t>今回の要求定義は、第三者保証（SGS検証等）への耐性とSSBJ基準への適合が中核要件でした。この領域での実績・知見の裏付けにおいて他社との差が最も大きく、評価上の最大の差分（配点10点の項目）となりました。</a:t>
             </a:r>
-            <a:endParaRPr lang="en-US" sz="980" dirty="0"/>
+            <a:endParaRPr lang="en-US" sz="940" dirty="0"/>
           </a:p>
         </p:txBody>
       </p:sp>
       <p:sp>
         <p:nvSpPr>
           <p:cNvPr id="14" name="Shape 10"/>
+          <p:cNvSpPr/>
+          <p:nvPr/>
+        </p:nvSpPr>
+        <p:spPr>
+          <a:xfrm>
+            <a:off x="4727448" y="2761488"/>
+            <a:ext cx="0" cy="603504"/>
+          </a:xfrm>
+          <a:prstGeom prst="line">
+            <a:avLst/>
+          </a:prstGeom>
+          <a:noFill/>
+          <a:ln w="12700">
+            <a:solidFill>
+              <a:srgbClr val="C9D5E6"/>
+            </a:solidFill>
+            <a:prstDash val="solid"/>
+          </a:ln>
+        </p:spPr>
+      </p:sp>
+      <p:sp>
+        <p:nvSpPr>
+          <p:cNvPr id="15" name="Text 11"/>
+          <p:cNvSpPr txBox="1"/>
+          <p:nvPr/>
+        </p:nvSpPr>
+        <p:spPr>
+          <a:xfrm>
+            <a:off x="4873752" y="2706624"/>
+            <a:ext cx="2350008" cy="237744"/>
+          </a:xfrm>
+          <a:prstGeom prst="rect">
+            <a:avLst/>
+          </a:prstGeom>
+          <a:noFill/>
+          <a:ln/>
+        </p:spPr>
+        <p:txBody>
+          <a:bodyPr wrap="square" lIns="0" tIns="0" rIns="0" bIns="0" rtlCol="0" anchor="ctr"/>
+          <a:lstStyle/>
+          <a:p>
+            <a:pPr indent="0" marL="0">
+              <a:buNone/>
+            </a:pPr>
+            <a:r>
+              <a:rPr lang="en-US" sz="920" b="1" dirty="0">
+                <a:solidFill>
+                  <a:srgbClr val="1F3864"/>
+                </a:solidFill>
+                <a:latin typeface="Meiryo" pitchFamily="34" charset="0"/>
+                <a:ea typeface="Meiryo" pitchFamily="34" charset="-122"/>
+                <a:cs typeface="Meiryo" pitchFamily="34" charset="-120"/>
+              </a:rPr>
+              <a:t>改善要素</a:t>
+            </a:r>
+            <a:endParaRPr lang="en-US" sz="920" dirty="0"/>
+          </a:p>
+        </p:txBody>
+      </p:sp>
+      <p:sp>
+        <p:nvSpPr>
+          <p:cNvPr id="16" name="Text 12"/>
+          <p:cNvSpPr txBox="1"/>
+          <p:nvPr/>
+        </p:nvSpPr>
+        <p:spPr>
+          <a:xfrm>
+            <a:off x="4873752" y="2962656"/>
+            <a:ext cx="2350008" cy="457200"/>
+          </a:xfrm>
+          <a:prstGeom prst="rect">
+            <a:avLst/>
+          </a:prstGeom>
+          <a:noFill/>
+          <a:ln/>
+        </p:spPr>
+        <p:txBody>
+          <a:bodyPr wrap="square" lIns="0" tIns="0" rIns="0" bIns="0" rtlCol="0" anchor="t"/>
+          <a:lstStyle/>
+          <a:p>
+            <a:pPr indent="0" marL="0">
+              <a:lnSpc>
+                <a:spcPct val="108000"/>
+              </a:lnSpc>
+              <a:buNone/>
+            </a:pPr>
+            <a:r>
+              <a:rPr lang="en-US" sz="900" dirty="0">
+                <a:solidFill>
+                  <a:srgbClr val="26303B"/>
+                </a:solidFill>
+                <a:latin typeface="Meiryo" pitchFamily="34" charset="0"/>
+                <a:ea typeface="Meiryo" pitchFamily="34" charset="-122"/>
+                <a:cs typeface="Meiryo" pitchFamily="34" charset="-120"/>
+              </a:rPr>
+              <a:t>SSBJ・保証対応の類似実績（体制・成果物・検証結果）の蓄積と具体的事例のご提示。外部専門家との連携体制の組成も一案です。</a:t>
+            </a:r>
+            <a:endParaRPr lang="en-US" sz="900" dirty="0"/>
+          </a:p>
+        </p:txBody>
+      </p:sp>
+      <p:sp>
+        <p:nvSpPr>
+          <p:cNvPr id="17" name="Shape 13"/>
           <p:cNvSpPr/>
           <p:nvPr/>
         </p:nvSpPr>
@@ -2840,13 +2944,13 @@
       </p:sp>
       <p:sp>
         <p:nvSpPr>
-          <p:cNvPr id="15" name="Shape 11"/>
+          <p:cNvPr id="18" name="Shape 14"/>
           <p:cNvSpPr/>
           <p:nvPr/>
         </p:nvSpPr>
         <p:spPr>
           <a:xfrm>
-            <a:off x="667512" y="3822192"/>
+            <a:off x="667512" y="3803904"/>
             <a:ext cx="384048" cy="384048"/>
           </a:xfrm>
           <a:prstGeom prst="ellipse">
@@ -2860,7 +2964,7 @@
       </p:sp>
       <p:pic>
         <p:nvPicPr>
-          <p:cNvPr id="16" name="Image 2" descr="preencoded.png">    </p:cNvPr>
+          <p:cNvPr id="19" name="Image 2" descr="preencoded.png">    </p:cNvPr>
           <p:cNvPicPr>
             <a:picLocks noChangeAspect="1"/>
           </p:cNvPicPr>
@@ -2874,7 +2978,7 @@
         </p:blipFill>
         <p:spPr>
           <a:xfrm>
-            <a:off x="754380" y="3909060"/>
+            <a:off x="754380" y="3890772"/>
             <a:ext cx="210312" cy="210312"/>
           </a:xfrm>
           <a:prstGeom prst="rect">
@@ -2884,14 +2988,14 @@
       </p:pic>
       <p:sp>
         <p:nvSpPr>
-          <p:cNvPr id="17" name="Text 12"/>
+          <p:cNvPr id="20" name="Text 15"/>
           <p:cNvSpPr txBox="1"/>
           <p:nvPr/>
         </p:nvSpPr>
         <p:spPr>
           <a:xfrm>
-            <a:off x="1161288" y="3803904"/>
-            <a:ext cx="6099048" cy="438912"/>
+            <a:off x="1161288" y="3785616"/>
+            <a:ext cx="6099048" cy="402336"/>
           </a:xfrm>
           <a:prstGeom prst="rect">
             <a:avLst/>
@@ -2923,14 +3027,14 @@
       </p:sp>
       <p:sp>
         <p:nvSpPr>
-          <p:cNvPr id="18" name="Text 13"/>
+          <p:cNvPr id="21" name="Text 16"/>
           <p:cNvSpPr txBox="1"/>
           <p:nvPr/>
         </p:nvSpPr>
         <p:spPr>
           <a:xfrm>
-            <a:off x="704088" y="4334256"/>
-            <a:ext cx="6501384" cy="566928"/>
+            <a:off x="704088" y="4261104"/>
+            <a:ext cx="3858768" cy="658368"/>
           </a:xfrm>
           <a:prstGeom prst="rect">
             <a:avLst/>
@@ -2944,12 +3048,12 @@
           <a:p>
             <a:pPr indent="0" marL="0">
               <a:lnSpc>
-                <a:spcPct val="112000"/>
+                <a:spcPct val="110000"/>
               </a:lnSpc>
               <a:buNone/>
             </a:pPr>
             <a:r>
-              <a:rPr lang="en-US" sz="980" dirty="0">
+              <a:rPr lang="en-US" sz="940" dirty="0">
                 <a:solidFill>
                   <a:srgbClr val="26303B"/>
                 </a:solidFill>
@@ -2957,15 +3061,119 @@
                 <a:ea typeface="Meiryo" pitchFamily="34" charset="-122"/>
                 <a:cs typeface="Meiryo" pitchFamily="34" charset="-120"/>
               </a:rPr>
-              <a:t>開示対応（守り）に加えて、非財務データの財務化・経営活用（攻め）を要件の柱としておりましたが、この領域の具体的な方法論・成果物のご提示が限定的でした。攻めの構想力は選定社との評価差が大きかった観点です。</a:t>
-            </a:r>
-            <a:endParaRPr lang="en-US" sz="980" dirty="0"/>
-          </a:p>
-        </p:txBody>
-      </p:sp>
-      <p:sp>
-        <p:nvSpPr>
-          <p:cNvPr id="19" name="Shape 14"/>
+              <a:t>開示対応（守り）に加えて、非財務データの財務化・経営活用（攻め）を要件の柱としておりましたが、この領域の具体的な方法論・成果物のご提示が限定的でした。</a:t>
+            </a:r>
+            <a:endParaRPr lang="en-US" sz="940" dirty="0"/>
+          </a:p>
+        </p:txBody>
+      </p:sp>
+      <p:sp>
+        <p:nvSpPr>
+          <p:cNvPr id="22" name="Shape 17"/>
+          <p:cNvSpPr/>
+          <p:nvPr/>
+        </p:nvSpPr>
+        <p:spPr>
+          <a:xfrm>
+            <a:off x="4727448" y="4279392"/>
+            <a:ext cx="0" cy="603504"/>
+          </a:xfrm>
+          <a:prstGeom prst="line">
+            <a:avLst/>
+          </a:prstGeom>
+          <a:noFill/>
+          <a:ln w="12700">
+            <a:solidFill>
+              <a:srgbClr val="C9D5E6"/>
+            </a:solidFill>
+            <a:prstDash val="solid"/>
+          </a:ln>
+        </p:spPr>
+      </p:sp>
+      <p:sp>
+        <p:nvSpPr>
+          <p:cNvPr id="23" name="Text 18"/>
+          <p:cNvSpPr txBox="1"/>
+          <p:nvPr/>
+        </p:nvSpPr>
+        <p:spPr>
+          <a:xfrm>
+            <a:off x="4873752" y="4224528"/>
+            <a:ext cx="2350008" cy="237744"/>
+          </a:xfrm>
+          <a:prstGeom prst="rect">
+            <a:avLst/>
+          </a:prstGeom>
+          <a:noFill/>
+          <a:ln/>
+        </p:spPr>
+        <p:txBody>
+          <a:bodyPr wrap="square" lIns="0" tIns="0" rIns="0" bIns="0" rtlCol="0" anchor="ctr"/>
+          <a:lstStyle/>
+          <a:p>
+            <a:pPr indent="0" marL="0">
+              <a:buNone/>
+            </a:pPr>
+            <a:r>
+              <a:rPr lang="en-US" sz="920" b="1" dirty="0">
+                <a:solidFill>
+                  <a:srgbClr val="1F3864"/>
+                </a:solidFill>
+                <a:latin typeface="Meiryo" pitchFamily="34" charset="0"/>
+                <a:ea typeface="Meiryo" pitchFamily="34" charset="-122"/>
+                <a:cs typeface="Meiryo" pitchFamily="34" charset="-120"/>
+              </a:rPr>
+              <a:t>改善要素</a:t>
+            </a:r>
+            <a:endParaRPr lang="en-US" sz="920" dirty="0"/>
+          </a:p>
+        </p:txBody>
+      </p:sp>
+      <p:sp>
+        <p:nvSpPr>
+          <p:cNvPr id="24" name="Text 19"/>
+          <p:cNvSpPr txBox="1"/>
+          <p:nvPr/>
+        </p:nvSpPr>
+        <p:spPr>
+          <a:xfrm>
+            <a:off x="4873752" y="4480560"/>
+            <a:ext cx="2350008" cy="457200"/>
+          </a:xfrm>
+          <a:prstGeom prst="rect">
+            <a:avLst/>
+          </a:prstGeom>
+          <a:noFill/>
+          <a:ln/>
+        </p:spPr>
+        <p:txBody>
+          <a:bodyPr wrap="square" lIns="0" tIns="0" rIns="0" bIns="0" rtlCol="0" anchor="t"/>
+          <a:lstStyle/>
+          <a:p>
+            <a:pPr indent="0" marL="0">
+              <a:lnSpc>
+                <a:spcPct val="108000"/>
+              </a:lnSpc>
+              <a:buNone/>
+            </a:pPr>
+            <a:r>
+              <a:rPr lang="en-US" sz="900" dirty="0">
+                <a:solidFill>
+                  <a:srgbClr val="26303B"/>
+                </a:solidFill>
+                <a:latin typeface="Meiryo" pitchFamily="34" charset="0"/>
+                <a:ea typeface="Meiryo" pitchFamily="34" charset="-122"/>
+                <a:cs typeface="Meiryo" pitchFamily="34" charset="-120"/>
+              </a:rPr>
+              <a:t>非財務データの財務化に関する方法論・成果物イメージ（ROI試算・経営ダッシュボード等）の具体化とご提示。</a:t>
+            </a:r>
+            <a:endParaRPr lang="en-US" sz="900" dirty="0"/>
+          </a:p>
+        </p:txBody>
+      </p:sp>
+      <p:sp>
+        <p:nvSpPr>
+          <p:cNvPr id="25" name="Shape 20"/>
           <p:cNvSpPr/>
           <p:nvPr/>
         </p:nvSpPr>
@@ -2994,13 +3202,13 @@
       </p:sp>
       <p:sp>
         <p:nvSpPr>
-          <p:cNvPr id="20" name="Shape 15"/>
+          <p:cNvPr id="26" name="Shape 21"/>
           <p:cNvSpPr/>
           <p:nvPr/>
         </p:nvSpPr>
         <p:spPr>
           <a:xfrm>
-            <a:off x="667512" y="5340096"/>
+            <a:off x="667512" y="5321808"/>
             <a:ext cx="384048" cy="384048"/>
           </a:xfrm>
           <a:prstGeom prst="ellipse">
@@ -3014,7 +3222,7 @@
       </p:sp>
       <p:pic>
         <p:nvPicPr>
-          <p:cNvPr id="21" name="Image 3" descr="preencoded.png">    </p:cNvPr>
+          <p:cNvPr id="27" name="Image 3" descr="preencoded.png">    </p:cNvPr>
           <p:cNvPicPr>
             <a:picLocks noChangeAspect="1"/>
           </p:cNvPicPr>
@@ -3028,7 +3236,7 @@
         </p:blipFill>
         <p:spPr>
           <a:xfrm>
-            <a:off x="754380" y="5426964"/>
+            <a:off x="754380" y="5408676"/>
             <a:ext cx="210312" cy="210312"/>
           </a:xfrm>
           <a:prstGeom prst="rect">
@@ -3038,14 +3246,14 @@
       </p:pic>
       <p:sp>
         <p:nvSpPr>
-          <p:cNvPr id="22" name="Text 16"/>
+          <p:cNvPr id="28" name="Text 22"/>
           <p:cNvSpPr txBox="1"/>
           <p:nvPr/>
         </p:nvSpPr>
         <p:spPr>
           <a:xfrm>
-            <a:off x="1161288" y="5321808"/>
-            <a:ext cx="6099048" cy="438912"/>
+            <a:off x="1161288" y="5303520"/>
+            <a:ext cx="6099048" cy="402336"/>
           </a:xfrm>
           <a:prstGeom prst="rect">
             <a:avLst/>
@@ -3077,14 +3285,14 @@
       </p:sp>
       <p:sp>
         <p:nvSpPr>
-          <p:cNvPr id="23" name="Text 17"/>
+          <p:cNvPr id="29" name="Text 23"/>
           <p:cNvSpPr txBox="1"/>
           <p:nvPr/>
         </p:nvSpPr>
         <p:spPr>
           <a:xfrm>
-            <a:off x="704088" y="5852160"/>
-            <a:ext cx="6501384" cy="566928"/>
+            <a:off x="704088" y="5779008"/>
+            <a:ext cx="3858768" cy="658368"/>
           </a:xfrm>
           <a:prstGeom prst="rect">
             <a:avLst/>
@@ -3098,12 +3306,12 @@
           <a:p>
             <a:pPr indent="0" marL="0">
               <a:lnSpc>
-                <a:spcPct val="112000"/>
+                <a:spcPct val="110000"/>
               </a:lnSpc>
               <a:buNone/>
             </a:pPr>
             <a:r>
-              <a:rPr lang="en-US" sz="980" dirty="0">
+              <a:rPr lang="en-US" sz="940" dirty="0">
                 <a:solidFill>
                   <a:srgbClr val="26303B"/>
                 </a:solidFill>
@@ -3111,15 +3319,119 @@
                 <a:ea typeface="Meiryo" pitchFamily="34" charset="-122"/>
                 <a:cs typeface="Meiryo" pitchFamily="34" charset="-120"/>
               </a:rPr>
-              <a:t>工程間の依存関係や拠点調査の負荷を織り込んだ実行計画（WBS）の具体性、および投資対効果の定量的なご説明において、確認したい点が残りました。実行局面の解像度がもう一段高いご提案を期待しておりました。</a:t>
-            </a:r>
-            <a:endParaRPr lang="en-US" sz="980" dirty="0"/>
-          </a:p>
-        </p:txBody>
-      </p:sp>
-      <p:sp>
-        <p:nvSpPr>
-          <p:cNvPr id="24" name="Shape 18"/>
+              <a:t>工程間の依存関係や拠点調査の負荷を織り込んだ実行計画（WBS）の具体性、および投資対効果の定量的なご説明において、確認したい点が残りました。</a:t>
+            </a:r>
+            <a:endParaRPr lang="en-US" sz="940" dirty="0"/>
+          </a:p>
+        </p:txBody>
+      </p:sp>
+      <p:sp>
+        <p:nvSpPr>
+          <p:cNvPr id="30" name="Shape 24"/>
+          <p:cNvSpPr/>
+          <p:nvPr/>
+        </p:nvSpPr>
+        <p:spPr>
+          <a:xfrm>
+            <a:off x="4727448" y="5797296"/>
+            <a:ext cx="0" cy="603504"/>
+          </a:xfrm>
+          <a:prstGeom prst="line">
+            <a:avLst/>
+          </a:prstGeom>
+          <a:noFill/>
+          <a:ln w="12700">
+            <a:solidFill>
+              <a:srgbClr val="C9D5E6"/>
+            </a:solidFill>
+            <a:prstDash val="solid"/>
+          </a:ln>
+        </p:spPr>
+      </p:sp>
+      <p:sp>
+        <p:nvSpPr>
+          <p:cNvPr id="31" name="Text 25"/>
+          <p:cNvSpPr txBox="1"/>
+          <p:nvPr/>
+        </p:nvSpPr>
+        <p:spPr>
+          <a:xfrm>
+            <a:off x="4873752" y="5742432"/>
+            <a:ext cx="2350008" cy="237744"/>
+          </a:xfrm>
+          <a:prstGeom prst="rect">
+            <a:avLst/>
+          </a:prstGeom>
+          <a:noFill/>
+          <a:ln/>
+        </p:spPr>
+        <p:txBody>
+          <a:bodyPr wrap="square" lIns="0" tIns="0" rIns="0" bIns="0" rtlCol="0" anchor="ctr"/>
+          <a:lstStyle/>
+          <a:p>
+            <a:pPr indent="0" marL="0">
+              <a:buNone/>
+            </a:pPr>
+            <a:r>
+              <a:rPr lang="en-US" sz="920" b="1" dirty="0">
+                <a:solidFill>
+                  <a:srgbClr val="1F3864"/>
+                </a:solidFill>
+                <a:latin typeface="Meiryo" pitchFamily="34" charset="0"/>
+                <a:ea typeface="Meiryo" pitchFamily="34" charset="-122"/>
+                <a:cs typeface="Meiryo" pitchFamily="34" charset="-120"/>
+              </a:rPr>
+              <a:t>改善要素</a:t>
+            </a:r>
+            <a:endParaRPr lang="en-US" sz="920" dirty="0"/>
+          </a:p>
+        </p:txBody>
+      </p:sp>
+      <p:sp>
+        <p:nvSpPr>
+          <p:cNvPr id="32" name="Text 26"/>
+          <p:cNvSpPr txBox="1"/>
+          <p:nvPr/>
+        </p:nvSpPr>
+        <p:spPr>
+          <a:xfrm>
+            <a:off x="4873752" y="5998464"/>
+            <a:ext cx="2350008" cy="457200"/>
+          </a:xfrm>
+          <a:prstGeom prst="rect">
+            <a:avLst/>
+          </a:prstGeom>
+          <a:noFill/>
+          <a:ln/>
+        </p:spPr>
+        <p:txBody>
+          <a:bodyPr wrap="square" lIns="0" tIns="0" rIns="0" bIns="0" rtlCol="0" anchor="t"/>
+          <a:lstStyle/>
+          <a:p>
+            <a:pPr indent="0" marL="0">
+              <a:lnSpc>
+                <a:spcPct val="108000"/>
+              </a:lnSpc>
+              <a:buNone/>
+            </a:pPr>
+            <a:r>
+              <a:rPr lang="en-US" sz="900" dirty="0">
+                <a:solidFill>
+                  <a:srgbClr val="26303B"/>
+                </a:solidFill>
+                <a:latin typeface="Meiryo" pitchFamily="34" charset="0"/>
+                <a:ea typeface="Meiryo" pitchFamily="34" charset="-122"/>
+                <a:cs typeface="Meiryo" pitchFamily="34" charset="-120"/>
+              </a:rPr>
+              <a:t>依存関係を織り込んだWBSの精緻化と、投資対効果（ROI）の定量的な試算根拠のご提示。</a:t>
+            </a:r>
+            <a:endParaRPr lang="en-US" sz="900" dirty="0"/>
+          </a:p>
+        </p:txBody>
+      </p:sp>
+      <p:sp>
+        <p:nvSpPr>
+          <p:cNvPr id="33" name="Shape 27"/>
           <p:cNvSpPr/>
           <p:nvPr/>
         </p:nvSpPr>
@@ -3139,7 +3451,7 @@
       </p:sp>
       <p:pic>
         <p:nvPicPr>
-          <p:cNvPr id="25" name="Image 4" descr="preencoded.png">    </p:cNvPr>
+          <p:cNvPr id="34" name="Image 4" descr="preencoded.png">    </p:cNvPr>
           <p:cNvPicPr>
             <a:picLocks noChangeAspect="1"/>
           </p:cNvPicPr>
@@ -3163,7 +3475,7 @@
       </p:pic>
       <p:sp>
         <p:nvSpPr>
-          <p:cNvPr id="26" name="Text 19"/>
+          <p:cNvPr id="35" name="Text 28"/>
           <p:cNvSpPr txBox="1"/>
           <p:nvPr/>
         </p:nvSpPr>
@@ -3202,7 +3514,7 @@
       </p:sp>
       <p:sp>
         <p:nvSpPr>
-          <p:cNvPr id="27" name="Shape 20"/>
+          <p:cNvPr id="36" name="Shape 29"/>
           <p:cNvSpPr/>
           <p:nvPr/>
         </p:nvSpPr>
@@ -3231,7 +3543,7 @@
       </p:sp>
       <p:sp>
         <p:nvSpPr>
-          <p:cNvPr id="28" name="Text 21"/>
+          <p:cNvPr id="37" name="Text 30"/>
           <p:cNvSpPr txBox="1"/>
           <p:nvPr/>
         </p:nvSpPr>
@@ -3322,7 +3634,7 @@
       </p:sp>
       <p:sp>
         <p:nvSpPr>
-          <p:cNvPr id="29" name="Text 22"/>
+          <p:cNvPr id="38" name="Text 31"/>
           <p:cNvSpPr txBox="1"/>
           <p:nvPr/>
         </p:nvSpPr>
